--- a/VIS3.pptx
+++ b/VIS3.pptx
@@ -13113,18 +13113,17 @@
           <p:cNvPicPr preferRelativeResize="0"/>
           <p:nvPr/>
         </p:nvPicPr>
-        <p:blipFill>
+        <p:blipFill rotWithShape="1">
           <a:blip r:embed="rId3">
             <a:alphaModFix/>
           </a:blip>
-          <a:stretch>
-            <a:fillRect/>
-          </a:stretch>
+          <a:srcRect b="0" l="0" r="0" t="13801"/>
+          <a:stretch/>
         </p:blipFill>
         <p:spPr>
           <a:xfrm>
-            <a:off x="1208738" y="152400"/>
-            <a:ext cx="7663156" cy="5365751"/>
+            <a:off x="675713" y="200875"/>
+            <a:ext cx="8729201" cy="5268800"/>
           </a:xfrm>
           <a:prstGeom prst="rect">
             <a:avLst/>
@@ -13166,18 +13165,17 @@
           <p:cNvPicPr preferRelativeResize="0"/>
           <p:nvPr/>
         </p:nvPicPr>
-        <p:blipFill>
+        <p:blipFill rotWithShape="1">
           <a:blip r:embed="rId3">
             <a:alphaModFix/>
           </a:blip>
-          <a:stretch>
-            <a:fillRect/>
-          </a:stretch>
+          <a:srcRect b="0" l="0" r="0" t="6664"/>
+          <a:stretch/>
         </p:blipFill>
         <p:spPr>
           <a:xfrm>
             <a:off x="1814600" y="0"/>
-            <a:ext cx="6451436" cy="5670550"/>
+            <a:ext cx="6451425" cy="5670550"/>
           </a:xfrm>
           <a:prstGeom prst="rect">
             <a:avLst/>
@@ -15383,7 +15381,7 @@
             <a:tbl>
               <a:tblPr>
                 <a:noFill/>
-                <a:tableStyleId>{98AB76AB-4FA7-4837-8043-DD9115E32689}</a:tableStyleId>
+                <a:tableStyleId>{0DD6F834-4304-4959-A6BC-A38527A4AE62}</a:tableStyleId>
               </a:tblPr>
               <a:tblGrid>
                 <a:gridCol w="4087825"/>
@@ -15809,7 +15807,7 @@
             <a:tbl>
               <a:tblPr>
                 <a:noFill/>
-                <a:tableStyleId>{98AB76AB-4FA7-4837-8043-DD9115E32689}</a:tableStyleId>
+                <a:tableStyleId>{0DD6F834-4304-4959-A6BC-A38527A4AE62}</a:tableStyleId>
               </a:tblPr>
               <a:tblGrid>
                 <a:gridCol w="2725200"/>
@@ -16255,7 +16253,7 @@
             <a:tbl>
               <a:tblPr>
                 <a:noFill/>
-                <a:tableStyleId>{98AB76AB-4FA7-4837-8043-DD9115E32689}</a:tableStyleId>
+                <a:tableStyleId>{0DD6F834-4304-4959-A6BC-A38527A4AE62}</a:tableStyleId>
               </a:tblPr>
               <a:tblGrid>
                 <a:gridCol w="4087825"/>
